--- a/examples/pm4_variable_replacement/variable_replacement_merged.pptx
+++ b/examples/pm4_variable_replacement/variable_replacement_merged.pptx
@@ -812,7 +812,7 @@
     </p:spTree>
     <p:extLst>
       <p:ext uri="{BB962C8B-B14F-4D97-AF65-F5344CB8AC3E}">
-        <p14:creationId xmlns:p14="http://schemas.microsoft.com/office/powerpoint/2010/main" val="834619040"/>
+        <p14:creationId xmlns:p14="http://schemas.microsoft.com/office/powerpoint/2010/main" val="2871796638"/>
       </p:ext>
     </p:extLst>
   </p:cSld>
@@ -1059,7 +1059,7 @@
     </p:spTree>
     <p:extLst>
       <p:ext uri="{BB962C8B-B14F-4D97-AF65-F5344CB8AC3E}">
-        <p14:creationId xmlns:p14="http://schemas.microsoft.com/office/powerpoint/2010/main" val="467888156"/>
+        <p14:creationId xmlns:p14="http://schemas.microsoft.com/office/powerpoint/2010/main" val="2814755008"/>
       </p:ext>
     </p:extLst>
   </p:cSld>
@@ -1167,7 +1167,7 @@
     </p:spTree>
     <p:extLst>
       <p:ext uri="{BB962C8B-B14F-4D97-AF65-F5344CB8AC3E}">
-        <p14:creationId xmlns:p14="http://schemas.microsoft.com/office/powerpoint/2010/main" val="1087661164"/>
+        <p14:creationId xmlns:p14="http://schemas.microsoft.com/office/powerpoint/2010/main" val="2375642608"/>
       </p:ext>
     </p:extLst>
   </p:cSld>
@@ -1275,7 +1275,7 @@
     </p:spTree>
     <p:extLst>
       <p:ext uri="{BB962C8B-B14F-4D97-AF65-F5344CB8AC3E}">
-        <p14:creationId xmlns:p14="http://schemas.microsoft.com/office/powerpoint/2010/main" val="3866198291"/>
+        <p14:creationId xmlns:p14="http://schemas.microsoft.com/office/powerpoint/2010/main" val="1596936507"/>
       </p:ext>
     </p:extLst>
   </p:cSld>
@@ -1383,7 +1383,7 @@
     </p:spTree>
     <p:extLst>
       <p:ext uri="{BB962C8B-B14F-4D97-AF65-F5344CB8AC3E}">
-        <p14:creationId xmlns:p14="http://schemas.microsoft.com/office/powerpoint/2010/main" val="336273545"/>
+        <p14:creationId xmlns:p14="http://schemas.microsoft.com/office/powerpoint/2010/main" val="4218714456"/>
       </p:ext>
     </p:extLst>
   </p:cSld>
@@ -1491,7 +1491,7 @@
     </p:spTree>
     <p:extLst>
       <p:ext uri="{BB962C8B-B14F-4D97-AF65-F5344CB8AC3E}">
-        <p14:creationId xmlns:p14="http://schemas.microsoft.com/office/powerpoint/2010/main" val="3426874756"/>
+        <p14:creationId xmlns:p14="http://schemas.microsoft.com/office/powerpoint/2010/main" val="418107450"/>
       </p:ext>
     </p:extLst>
   </p:cSld>
@@ -5319,7 +5319,7 @@
     </p:spTree>
     <p:extLst>
       <p:ext uri="{BB962C8B-B14F-4D97-AF65-F5344CB8AC3E}">
-        <p14:creationId xmlns:p14="http://schemas.microsoft.com/office/powerpoint/2010/main" val="64221315"/>
+        <p14:creationId xmlns:p14="http://schemas.microsoft.com/office/powerpoint/2010/main" val="3061997669"/>
       </p:ext>
     </p:extLst>
   </p:cSld>
@@ -6469,7 +6469,7 @@
     </p:spTree>
     <p:extLst>
       <p:ext uri="{BB962C8B-B14F-4D97-AF65-F5344CB8AC3E}">
-        <p14:creationId xmlns:p14="http://schemas.microsoft.com/office/powerpoint/2010/main" val="560659914"/>
+        <p14:creationId xmlns:p14="http://schemas.microsoft.com/office/powerpoint/2010/main" val="3240444570"/>
       </p:ext>
     </p:extLst>
   </p:cSld>
@@ -7027,7 +7027,7 @@
     </p:spTree>
     <p:extLst>
       <p:ext uri="{BB962C8B-B14F-4D97-AF65-F5344CB8AC3E}">
-        <p14:creationId xmlns:p14="http://schemas.microsoft.com/office/powerpoint/2010/main" val="2831658575"/>
+        <p14:creationId xmlns:p14="http://schemas.microsoft.com/office/powerpoint/2010/main" val="2137739860"/>
       </p:ext>
     </p:extLst>
   </p:cSld>
@@ -7534,7 +7534,7 @@
     </p:spTree>
     <p:extLst>
       <p:ext uri="{BB962C8B-B14F-4D97-AF65-F5344CB8AC3E}">
-        <p14:creationId xmlns:p14="http://schemas.microsoft.com/office/powerpoint/2010/main" val="3822056320"/>
+        <p14:creationId xmlns:p14="http://schemas.microsoft.com/office/powerpoint/2010/main" val="3318675125"/>
       </p:ext>
     </p:extLst>
   </p:cSld>
@@ -8100,7 +8100,7 @@
     </p:spTree>
     <p:extLst>
       <p:ext uri="{BB962C8B-B14F-4D97-AF65-F5344CB8AC3E}">
-        <p14:creationId xmlns:p14="http://schemas.microsoft.com/office/powerpoint/2010/main" val="1123175234"/>
+        <p14:creationId xmlns:p14="http://schemas.microsoft.com/office/powerpoint/2010/main" val="1960906958"/>
       </p:ext>
     </p:extLst>
   </p:cSld>
@@ -8621,7 +8621,7 @@
     </p:spTree>
     <p:extLst>
       <p:ext uri="{BB962C8B-B14F-4D97-AF65-F5344CB8AC3E}">
-        <p14:creationId xmlns:p14="http://schemas.microsoft.com/office/powerpoint/2010/main" val="2447705599"/>
+        <p14:creationId xmlns:p14="http://schemas.microsoft.com/office/powerpoint/2010/main" val="207704374"/>
       </p:ext>
     </p:extLst>
   </p:cSld>

--- a/examples/pm4_variable_replacement/variable_replacement_merged.pptx
+++ b/examples/pm4_variable_replacement/variable_replacement_merged.pptx
@@ -243,7 +243,7 @@
           <a:p>
             <a:fld id="{294670BC-B8C6-44A7-84E1-23632D8FD86F}" type="datetimeFigureOut">
               <a:rPr kumimoji="1" lang="ja-JP" altLang="en-US" smtClean="0"/>
-              <a:t>2026/6/4</a:t>
+              <a:t>2026/6/6</a:t>
             </a:fld>
             <a:endParaRPr kumimoji="1" lang="ja-JP" altLang="en-US"/>
           </a:p>
@@ -812,7 +812,7 @@
     </p:spTree>
     <p:extLst>
       <p:ext uri="{BB962C8B-B14F-4D97-AF65-F5344CB8AC3E}">
-        <p14:creationId xmlns:p14="http://schemas.microsoft.com/office/powerpoint/2010/main" val="2871796638"/>
+        <p14:creationId xmlns:p14="http://schemas.microsoft.com/office/powerpoint/2010/main" val="134406976"/>
       </p:ext>
     </p:extLst>
   </p:cSld>
@@ -1059,7 +1059,7 @@
     </p:spTree>
     <p:extLst>
       <p:ext uri="{BB962C8B-B14F-4D97-AF65-F5344CB8AC3E}">
-        <p14:creationId xmlns:p14="http://schemas.microsoft.com/office/powerpoint/2010/main" val="2814755008"/>
+        <p14:creationId xmlns:p14="http://schemas.microsoft.com/office/powerpoint/2010/main" val="4009144559"/>
       </p:ext>
     </p:extLst>
   </p:cSld>
@@ -1167,7 +1167,7 @@
     </p:spTree>
     <p:extLst>
       <p:ext uri="{BB962C8B-B14F-4D97-AF65-F5344CB8AC3E}">
-        <p14:creationId xmlns:p14="http://schemas.microsoft.com/office/powerpoint/2010/main" val="2375642608"/>
+        <p14:creationId xmlns:p14="http://schemas.microsoft.com/office/powerpoint/2010/main" val="427639631"/>
       </p:ext>
     </p:extLst>
   </p:cSld>
@@ -1275,7 +1275,7 @@
     </p:spTree>
     <p:extLst>
       <p:ext uri="{BB962C8B-B14F-4D97-AF65-F5344CB8AC3E}">
-        <p14:creationId xmlns:p14="http://schemas.microsoft.com/office/powerpoint/2010/main" val="1596936507"/>
+        <p14:creationId xmlns:p14="http://schemas.microsoft.com/office/powerpoint/2010/main" val="141980463"/>
       </p:ext>
     </p:extLst>
   </p:cSld>
@@ -1383,7 +1383,7 @@
     </p:spTree>
     <p:extLst>
       <p:ext uri="{BB962C8B-B14F-4D97-AF65-F5344CB8AC3E}">
-        <p14:creationId xmlns:p14="http://schemas.microsoft.com/office/powerpoint/2010/main" val="4218714456"/>
+        <p14:creationId xmlns:p14="http://schemas.microsoft.com/office/powerpoint/2010/main" val="4172998879"/>
       </p:ext>
     </p:extLst>
   </p:cSld>
@@ -1491,7 +1491,7 @@
     </p:spTree>
     <p:extLst>
       <p:ext uri="{BB962C8B-B14F-4D97-AF65-F5344CB8AC3E}">
-        <p14:creationId xmlns:p14="http://schemas.microsoft.com/office/powerpoint/2010/main" val="418107450"/>
+        <p14:creationId xmlns:p14="http://schemas.microsoft.com/office/powerpoint/2010/main" val="1645271920"/>
       </p:ext>
     </p:extLst>
   </p:cSld>
@@ -5319,7 +5319,7 @@
     </p:spTree>
     <p:extLst>
       <p:ext uri="{BB962C8B-B14F-4D97-AF65-F5344CB8AC3E}">
-        <p14:creationId xmlns:p14="http://schemas.microsoft.com/office/powerpoint/2010/main" val="3061997669"/>
+        <p14:creationId xmlns:p14="http://schemas.microsoft.com/office/powerpoint/2010/main" val="2688054599"/>
       </p:ext>
     </p:extLst>
   </p:cSld>
@@ -6469,7 +6469,7 @@
     </p:spTree>
     <p:extLst>
       <p:ext uri="{BB962C8B-B14F-4D97-AF65-F5344CB8AC3E}">
-        <p14:creationId xmlns:p14="http://schemas.microsoft.com/office/powerpoint/2010/main" val="3240444570"/>
+        <p14:creationId xmlns:p14="http://schemas.microsoft.com/office/powerpoint/2010/main" val="2368594424"/>
       </p:ext>
     </p:extLst>
   </p:cSld>
@@ -7027,7 +7027,7 @@
     </p:spTree>
     <p:extLst>
       <p:ext uri="{BB962C8B-B14F-4D97-AF65-F5344CB8AC3E}">
-        <p14:creationId xmlns:p14="http://schemas.microsoft.com/office/powerpoint/2010/main" val="2137739860"/>
+        <p14:creationId xmlns:p14="http://schemas.microsoft.com/office/powerpoint/2010/main" val="295132216"/>
       </p:ext>
     </p:extLst>
   </p:cSld>
@@ -7534,7 +7534,7 @@
     </p:spTree>
     <p:extLst>
       <p:ext uri="{BB962C8B-B14F-4D97-AF65-F5344CB8AC3E}">
-        <p14:creationId xmlns:p14="http://schemas.microsoft.com/office/powerpoint/2010/main" val="3318675125"/>
+        <p14:creationId xmlns:p14="http://schemas.microsoft.com/office/powerpoint/2010/main" val="2489622765"/>
       </p:ext>
     </p:extLst>
   </p:cSld>
@@ -8100,7 +8100,7 @@
     </p:spTree>
     <p:extLst>
       <p:ext uri="{BB962C8B-B14F-4D97-AF65-F5344CB8AC3E}">
-        <p14:creationId xmlns:p14="http://schemas.microsoft.com/office/powerpoint/2010/main" val="1960906958"/>
+        <p14:creationId xmlns:p14="http://schemas.microsoft.com/office/powerpoint/2010/main" val="1068784862"/>
       </p:ext>
     </p:extLst>
   </p:cSld>
@@ -8621,7 +8621,7 @@
     </p:spTree>
     <p:extLst>
       <p:ext uri="{BB962C8B-B14F-4D97-AF65-F5344CB8AC3E}">
-        <p14:creationId xmlns:p14="http://schemas.microsoft.com/office/powerpoint/2010/main" val="207704374"/>
+        <p14:creationId xmlns:p14="http://schemas.microsoft.com/office/powerpoint/2010/main" val="852409610"/>
       </p:ext>
     </p:extLst>
   </p:cSld>
